--- a/602/final_project/NYC Citywide Payroll.pptx
+++ b/602/final_project/NYC Citywide Payroll.pptx
@@ -126,6 +126,11 @@
       </a:defRPr>
     </a:lvl9pPr>
   </p:defaultTextStyle>
+  <p:extLst>
+    <p:ext uri="{EFAFB233-063F-42B5-8137-9DF3F51BA10A}">
+      <p15:sldGuideLst xmlns:p15="http://schemas.microsoft.com/office/powerpoint/2012/main"/>
+    </p:ext>
+  </p:extLst>
 </p:presentation>
 </file>
 
@@ -276,7 +281,7 @@
           <a:p>
             <a:fld id="{18CC3651-A54C-424B-AD5C-7DCFB5F1FB41}" type="datetimeFigureOut">
               <a:rPr lang="en-US" smtClean="0"/>
-              <a:t>5/14/2026</a:t>
+              <a:t>5/15/2026</a:t>
             </a:fld>
             <a:endParaRPr lang="en-US"/>
           </a:p>
@@ -474,7 +479,7 @@
           <a:p>
             <a:fld id="{18CC3651-A54C-424B-AD5C-7DCFB5F1FB41}" type="datetimeFigureOut">
               <a:rPr lang="en-US" smtClean="0"/>
-              <a:t>5/14/2026</a:t>
+              <a:t>5/15/2026</a:t>
             </a:fld>
             <a:endParaRPr lang="en-US"/>
           </a:p>
@@ -682,7 +687,7 @@
           <a:p>
             <a:fld id="{18CC3651-A54C-424B-AD5C-7DCFB5F1FB41}" type="datetimeFigureOut">
               <a:rPr lang="en-US" smtClean="0"/>
-              <a:t>5/14/2026</a:t>
+              <a:t>5/15/2026</a:t>
             </a:fld>
             <a:endParaRPr lang="en-US"/>
           </a:p>
@@ -880,7 +885,7 @@
           <a:p>
             <a:fld id="{18CC3651-A54C-424B-AD5C-7DCFB5F1FB41}" type="datetimeFigureOut">
               <a:rPr lang="en-US" smtClean="0"/>
-              <a:t>5/14/2026</a:t>
+              <a:t>5/15/2026</a:t>
             </a:fld>
             <a:endParaRPr lang="en-US"/>
           </a:p>
@@ -1155,7 +1160,7 @@
           <a:p>
             <a:fld id="{18CC3651-A54C-424B-AD5C-7DCFB5F1FB41}" type="datetimeFigureOut">
               <a:rPr lang="en-US" smtClean="0"/>
-              <a:t>5/14/2026</a:t>
+              <a:t>5/15/2026</a:t>
             </a:fld>
             <a:endParaRPr lang="en-US"/>
           </a:p>
@@ -1420,7 +1425,7 @@
           <a:p>
             <a:fld id="{18CC3651-A54C-424B-AD5C-7DCFB5F1FB41}" type="datetimeFigureOut">
               <a:rPr lang="en-US" smtClean="0"/>
-              <a:t>5/14/2026</a:t>
+              <a:t>5/15/2026</a:t>
             </a:fld>
             <a:endParaRPr lang="en-US"/>
           </a:p>
@@ -1832,7 +1837,7 @@
           <a:p>
             <a:fld id="{18CC3651-A54C-424B-AD5C-7DCFB5F1FB41}" type="datetimeFigureOut">
               <a:rPr lang="en-US" smtClean="0"/>
-              <a:t>5/14/2026</a:t>
+              <a:t>5/15/2026</a:t>
             </a:fld>
             <a:endParaRPr lang="en-US"/>
           </a:p>
@@ -1973,7 +1978,7 @@
           <a:p>
             <a:fld id="{18CC3651-A54C-424B-AD5C-7DCFB5F1FB41}" type="datetimeFigureOut">
               <a:rPr lang="en-US" smtClean="0"/>
-              <a:t>5/14/2026</a:t>
+              <a:t>5/15/2026</a:t>
             </a:fld>
             <a:endParaRPr lang="en-US"/>
           </a:p>
@@ -2086,7 +2091,7 @@
           <a:p>
             <a:fld id="{18CC3651-A54C-424B-AD5C-7DCFB5F1FB41}" type="datetimeFigureOut">
               <a:rPr lang="en-US" smtClean="0"/>
-              <a:t>5/14/2026</a:t>
+              <a:t>5/15/2026</a:t>
             </a:fld>
             <a:endParaRPr lang="en-US"/>
           </a:p>
@@ -2397,7 +2402,7 @@
           <a:p>
             <a:fld id="{18CC3651-A54C-424B-AD5C-7DCFB5F1FB41}" type="datetimeFigureOut">
               <a:rPr lang="en-US" smtClean="0"/>
-              <a:t>5/14/2026</a:t>
+              <a:t>5/15/2026</a:t>
             </a:fld>
             <a:endParaRPr lang="en-US"/>
           </a:p>
@@ -2685,7 +2690,7 @@
           <a:p>
             <a:fld id="{18CC3651-A54C-424B-AD5C-7DCFB5F1FB41}" type="datetimeFigureOut">
               <a:rPr lang="en-US" smtClean="0"/>
-              <a:t>5/14/2026</a:t>
+              <a:t>5/15/2026</a:t>
             </a:fld>
             <a:endParaRPr lang="en-US"/>
           </a:p>
@@ -2926,7 +2931,7 @@
           <a:p>
             <a:fld id="{18CC3651-A54C-424B-AD5C-7DCFB5F1FB41}" type="datetimeFigureOut">
               <a:rPr lang="en-US" smtClean="0"/>
-              <a:t>5/14/2026</a:t>
+              <a:t>5/15/2026</a:t>
             </a:fld>
             <a:endParaRPr lang="en-US"/>
           </a:p>
@@ -3515,7 +3520,7 @@
                 <a:latin typeface="Calibri"/>
                 <a:cs typeface="Calibri"/>
               </a:rPr>
-              <a:t>[Your Name]</a:t>
+              <a:t>Shawn Ganz</a:t>
             </a:r>
           </a:p>
         </p:txBody>
